--- a/Навык для Алисы.pptx
+++ b/Навык для Алисы.pptx
@@ -6,13 +6,12 @@
   </p:sldMasterIdLst>
   <p:sldIdLst>
     <p:sldId id="256" r:id="rId2"/>
-    <p:sldId id="258" r:id="rId3"/>
-    <p:sldId id="259" r:id="rId4"/>
-    <p:sldId id="262" r:id="rId5"/>
-    <p:sldId id="260" r:id="rId6"/>
-    <p:sldId id="261" r:id="rId7"/>
-    <p:sldId id="263" r:id="rId8"/>
-    <p:sldId id="264" r:id="rId9"/>
+    <p:sldId id="259" r:id="rId3"/>
+    <p:sldId id="262" r:id="rId4"/>
+    <p:sldId id="260" r:id="rId5"/>
+    <p:sldId id="261" r:id="rId6"/>
+    <p:sldId id="263" r:id="rId7"/>
+    <p:sldId id="264" r:id="rId8"/>
   </p:sldIdLst>
   <p:sldSz cx="12192000" cy="6858000"/>
   <p:notesSz cx="6858000" cy="9144000"/>
@@ -111,6 +110,11 @@
       </a:defRPr>
     </a:lvl9pPr>
   </p:defaultTextStyle>
+  <p:extLst>
+    <p:ext uri="{EFAFB233-063F-42B5-8137-9DF3F51BA10A}">
+      <p15:sldGuideLst xmlns:p15="http://schemas.microsoft.com/office/powerpoint/2012/main"/>
+    </p:ext>
+  </p:extLst>
 </p:presentation>
 </file>
 
@@ -261,7 +265,7 @@
           <a:p>
             <a:fld id="{4D22AD9D-AFF2-48E6-9CED-92F107A406EE}" type="datetimeFigureOut">
               <a:rPr lang="ru-RU" smtClean="0"/>
-              <a:t>14.05.2026</a:t>
+              <a:t>17.05.2026</a:t>
             </a:fld>
             <a:endParaRPr lang="ru-RU"/>
           </a:p>
@@ -459,7 +463,7 @@
           <a:p>
             <a:fld id="{4D22AD9D-AFF2-48E6-9CED-92F107A406EE}" type="datetimeFigureOut">
               <a:rPr lang="ru-RU" smtClean="0"/>
-              <a:t>14.05.2026</a:t>
+              <a:t>17.05.2026</a:t>
             </a:fld>
             <a:endParaRPr lang="ru-RU"/>
           </a:p>
@@ -667,7 +671,7 @@
           <a:p>
             <a:fld id="{4D22AD9D-AFF2-48E6-9CED-92F107A406EE}" type="datetimeFigureOut">
               <a:rPr lang="ru-RU" smtClean="0"/>
-              <a:t>14.05.2026</a:t>
+              <a:t>17.05.2026</a:t>
             </a:fld>
             <a:endParaRPr lang="ru-RU"/>
           </a:p>
@@ -865,7 +869,7 @@
           <a:p>
             <a:fld id="{4D22AD9D-AFF2-48E6-9CED-92F107A406EE}" type="datetimeFigureOut">
               <a:rPr lang="ru-RU" smtClean="0"/>
-              <a:t>14.05.2026</a:t>
+              <a:t>17.05.2026</a:t>
             </a:fld>
             <a:endParaRPr lang="ru-RU"/>
           </a:p>
@@ -1140,7 +1144,7 @@
           <a:p>
             <a:fld id="{4D22AD9D-AFF2-48E6-9CED-92F107A406EE}" type="datetimeFigureOut">
               <a:rPr lang="ru-RU" smtClean="0"/>
-              <a:t>14.05.2026</a:t>
+              <a:t>17.05.2026</a:t>
             </a:fld>
             <a:endParaRPr lang="ru-RU"/>
           </a:p>
@@ -1405,7 +1409,7 @@
           <a:p>
             <a:fld id="{4D22AD9D-AFF2-48E6-9CED-92F107A406EE}" type="datetimeFigureOut">
               <a:rPr lang="ru-RU" smtClean="0"/>
-              <a:t>14.05.2026</a:t>
+              <a:t>17.05.2026</a:t>
             </a:fld>
             <a:endParaRPr lang="ru-RU"/>
           </a:p>
@@ -1817,7 +1821,7 @@
           <a:p>
             <a:fld id="{4D22AD9D-AFF2-48E6-9CED-92F107A406EE}" type="datetimeFigureOut">
               <a:rPr lang="ru-RU" smtClean="0"/>
-              <a:t>14.05.2026</a:t>
+              <a:t>17.05.2026</a:t>
             </a:fld>
             <a:endParaRPr lang="ru-RU"/>
           </a:p>
@@ -1958,7 +1962,7 @@
           <a:p>
             <a:fld id="{4D22AD9D-AFF2-48E6-9CED-92F107A406EE}" type="datetimeFigureOut">
               <a:rPr lang="ru-RU" smtClean="0"/>
-              <a:t>14.05.2026</a:t>
+              <a:t>17.05.2026</a:t>
             </a:fld>
             <a:endParaRPr lang="ru-RU"/>
           </a:p>
@@ -2071,7 +2075,7 @@
           <a:p>
             <a:fld id="{4D22AD9D-AFF2-48E6-9CED-92F107A406EE}" type="datetimeFigureOut">
               <a:rPr lang="ru-RU" smtClean="0"/>
-              <a:t>14.05.2026</a:t>
+              <a:t>17.05.2026</a:t>
             </a:fld>
             <a:endParaRPr lang="ru-RU"/>
           </a:p>
@@ -2382,7 +2386,7 @@
           <a:p>
             <a:fld id="{4D22AD9D-AFF2-48E6-9CED-92F107A406EE}" type="datetimeFigureOut">
               <a:rPr lang="ru-RU" smtClean="0"/>
-              <a:t>14.05.2026</a:t>
+              <a:t>17.05.2026</a:t>
             </a:fld>
             <a:endParaRPr lang="ru-RU"/>
           </a:p>
@@ -2670,7 +2674,7 @@
           <a:p>
             <a:fld id="{4D22AD9D-AFF2-48E6-9CED-92F107A406EE}" type="datetimeFigureOut">
               <a:rPr lang="ru-RU" smtClean="0"/>
-              <a:t>14.05.2026</a:t>
+              <a:t>17.05.2026</a:t>
             </a:fld>
             <a:endParaRPr lang="ru-RU"/>
           </a:p>
@@ -2911,7 +2915,7 @@
           <a:p>
             <a:fld id="{4D22AD9D-AFF2-48E6-9CED-92F107A406EE}" type="datetimeFigureOut">
               <a:rPr lang="ru-RU" smtClean="0"/>
-              <a:t>14.05.2026</a:t>
+              <a:t>17.05.2026</a:t>
             </a:fld>
             <a:endParaRPr lang="ru-RU"/>
           </a:p>
@@ -3424,147 +3428,6 @@
           <p:cNvPr id="2" name="Заголовок 1">
             <a:extLst>
               <a:ext uri="{FF2B5EF4-FFF2-40B4-BE49-F238E27FC236}">
-                <a16:creationId xmlns:a16="http://schemas.microsoft.com/office/drawing/2014/main" id="{2248D723-A417-4A44-B03C-AF9FE1ADD5B5}"/>
-              </a:ext>
-            </a:extLst>
-          </p:cNvPr>
-          <p:cNvSpPr>
-            <a:spLocks noGrp="1"/>
-          </p:cNvSpPr>
-          <p:nvPr>
-            <p:ph type="title"/>
-          </p:nvPr>
-        </p:nvSpPr>
-        <p:spPr/>
-        <p:txBody>
-          <a:bodyPr/>
-          <a:lstStyle/>
-          <a:p>
-            <a:r>
-              <a:rPr lang="ru-RU" dirty="0"/>
-              <a:t>Давным-давно</a:t>
-            </a:r>
-          </a:p>
-        </p:txBody>
-      </p:sp>
-      <p:sp>
-        <p:nvSpPr>
-          <p:cNvPr id="3" name="Объект 2">
-            <a:extLst>
-              <a:ext uri="{FF2B5EF4-FFF2-40B4-BE49-F238E27FC236}">
-                <a16:creationId xmlns:a16="http://schemas.microsoft.com/office/drawing/2014/main" id="{6DAF3B2B-B312-45B0-B657-3043F4FD8B8B}"/>
-              </a:ext>
-            </a:extLst>
-          </p:cNvPr>
-          <p:cNvSpPr>
-            <a:spLocks noGrp="1"/>
-          </p:cNvSpPr>
-          <p:nvPr>
-            <p:ph idx="1"/>
-          </p:nvPr>
-        </p:nvSpPr>
-        <p:spPr/>
-        <p:txBody>
-          <a:bodyPr>
-            <a:normAutofit/>
-          </a:bodyPr>
-          <a:lstStyle/>
-          <a:p>
-            <a:pPr marL="0" indent="0">
-              <a:buNone/>
-            </a:pPr>
-            <a:r>
-              <a:rPr lang="ru-RU" dirty="0"/>
-              <a:t>Двое </a:t>
-            </a:r>
-            <a:r>
-              <a:rPr lang="ru-RU" dirty="0" err="1"/>
-              <a:t>бравл</a:t>
-            </a:r>
-            <a:r>
-              <a:rPr lang="ru-RU" dirty="0"/>
-              <a:t> </a:t>
-            </a:r>
-            <a:r>
-              <a:rPr lang="ru-RU" dirty="0" err="1"/>
-              <a:t>старсеров</a:t>
-            </a:r>
-            <a:r>
-              <a:rPr lang="ru-RU" dirty="0"/>
-              <a:t> не могли найти себе игру, потому что тупые.</a:t>
-            </a:r>
-          </a:p>
-          <a:p>
-            <a:pPr marL="0" indent="0">
-              <a:buNone/>
-            </a:pPr>
-            <a:r>
-              <a:rPr lang="ru-RU" dirty="0"/>
-              <a:t>Они поняли, кто, как не они спасут мир от этого хаоса? В круговороте самых разных сценариев они пришли к мысли, а затем к идее. Идее создать навык для Алисы, чтобы он делал ничего, но выглядел круто. А потом они проснулись на опушке в лесу, рядом с мухоморами……</a:t>
-            </a:r>
-          </a:p>
-          <a:p>
-            <a:pPr marL="0" indent="0">
-              <a:buNone/>
-            </a:pPr>
-            <a:endParaRPr lang="ru-RU" dirty="0"/>
-          </a:p>
-          <a:p>
-            <a:pPr marL="0" indent="0">
-              <a:buNone/>
-            </a:pPr>
-            <a:endParaRPr lang="ru-RU" dirty="0"/>
-          </a:p>
-          <a:p>
-            <a:pPr marL="0" indent="0">
-              <a:buNone/>
-            </a:pPr>
-            <a:r>
-              <a:rPr lang="en-US" dirty="0"/>
-              <a:t>P.S. </a:t>
-            </a:r>
-            <a:r>
-              <a:rPr lang="ru-RU" dirty="0"/>
-              <a:t>В итоге он не крутой и не рабочий…..</a:t>
-            </a:r>
-          </a:p>
-        </p:txBody>
-      </p:sp>
-    </p:spTree>
-    <p:extLst>
-      <p:ext uri="{BB962C8B-B14F-4D97-AF65-F5344CB8AC3E}">
-        <p14:creationId xmlns:p14="http://schemas.microsoft.com/office/powerpoint/2010/main" val="4098425846"/>
-      </p:ext>
-    </p:extLst>
-  </p:cSld>
-  <p:clrMapOvr>
-    <a:masterClrMapping/>
-  </p:clrMapOvr>
-</p:sld>
-</file>
-
-<file path=ppt/slides/slide3.xml><?xml version="1.0" encoding="utf-8"?>
-<p:sld xmlns:a="http://schemas.openxmlformats.org/drawingml/2006/main" xmlns:r="http://schemas.openxmlformats.org/officeDocument/2006/relationships" xmlns:p="http://schemas.openxmlformats.org/presentationml/2006/main">
-  <p:cSld>
-    <p:spTree>
-      <p:nvGrpSpPr>
-        <p:cNvPr id="1" name=""/>
-        <p:cNvGrpSpPr/>
-        <p:nvPr/>
-      </p:nvGrpSpPr>
-      <p:grpSpPr>
-        <a:xfrm>
-          <a:off x="0" y="0"/>
-          <a:ext cx="0" cy="0"/>
-          <a:chOff x="0" y="0"/>
-          <a:chExt cx="0" cy="0"/>
-        </a:xfrm>
-      </p:grpSpPr>
-      <p:sp>
-        <p:nvSpPr>
-          <p:cNvPr id="2" name="Заголовок 1">
-            <a:extLst>
-              <a:ext uri="{FF2B5EF4-FFF2-40B4-BE49-F238E27FC236}">
                 <a16:creationId xmlns:a16="http://schemas.microsoft.com/office/drawing/2014/main" id="{5F7B9FD6-9832-4D39-9311-08B9CE600F52}"/>
               </a:ext>
             </a:extLst>
@@ -3836,7 +3699,7 @@
 </p:sld>
 </file>
 
-<file path=ppt/slides/slide4.xml><?xml version="1.0" encoding="utf-8"?>
+<file path=ppt/slides/slide3.xml><?xml version="1.0" encoding="utf-8"?>
 <p:sld xmlns:a="http://schemas.openxmlformats.org/drawingml/2006/main" xmlns:r="http://schemas.openxmlformats.org/officeDocument/2006/relationships" xmlns:p="http://schemas.openxmlformats.org/presentationml/2006/main">
   <p:cSld>
     <p:spTree>
@@ -4016,7 +3879,7 @@
 </p:sld>
 </file>
 
-<file path=ppt/slides/slide5.xml><?xml version="1.0" encoding="utf-8"?>
+<file path=ppt/slides/slide4.xml><?xml version="1.0" encoding="utf-8"?>
 <p:sld xmlns:a="http://schemas.openxmlformats.org/drawingml/2006/main" xmlns:r="http://schemas.openxmlformats.org/officeDocument/2006/relationships" xmlns:p="http://schemas.openxmlformats.org/presentationml/2006/main">
   <p:cSld>
     <p:spTree>
@@ -4193,7 +4056,7 @@
 </p:sld>
 </file>
 
-<file path=ppt/slides/slide6.xml><?xml version="1.0" encoding="utf-8"?>
+<file path=ppt/slides/slide5.xml><?xml version="1.0" encoding="utf-8"?>
 <p:sld xmlns:a="http://schemas.openxmlformats.org/drawingml/2006/main" xmlns:r="http://schemas.openxmlformats.org/officeDocument/2006/relationships" xmlns:p="http://schemas.openxmlformats.org/presentationml/2006/main">
   <p:cSld>
     <p:spTree>
@@ -4416,7 +4279,7 @@
 </p:sld>
 </file>
 
-<file path=ppt/slides/slide7.xml><?xml version="1.0" encoding="utf-8"?>
+<file path=ppt/slides/slide6.xml><?xml version="1.0" encoding="utf-8"?>
 <p:sld xmlns:a="http://schemas.openxmlformats.org/drawingml/2006/main" xmlns:r="http://schemas.openxmlformats.org/officeDocument/2006/relationships" xmlns:p="http://schemas.openxmlformats.org/presentationml/2006/main">
   <p:cSld>
     <p:spTree>
@@ -4580,7 +4443,7 @@
 </p:sld>
 </file>
 
-<file path=ppt/slides/slide8.xml><?xml version="1.0" encoding="utf-8"?>
+<file path=ppt/slides/slide7.xml><?xml version="1.0" encoding="utf-8"?>
 <p:sld xmlns:a="http://schemas.openxmlformats.org/drawingml/2006/main" xmlns:r="http://schemas.openxmlformats.org/officeDocument/2006/relationships" xmlns:p="http://schemas.openxmlformats.org/presentationml/2006/main">
   <p:cSld>
     <p:spTree>
